--- a/public/fun/cards/life/life-22.pptx
+++ b/public/fun/cards/life/life-22.pptx
@@ -3085,7 +3085,7 @@
     <p:bg>
       <p:bgPr>
         <a:solidFill>
-          <a:srgbClr val="FFFFFF"/>
+          <a:srgbClr val="FFF3F2"/>
         </a:solidFill>
         <a:effectLst/>
       </p:bgPr>
@@ -3099,14 +3099,145 @@
       <p:grpSpPr/>
       <p:sp>
         <p:nvSpPr>
-          <p:cNvPr id="2" name="텍스트"/>
+          <p:cNvPr id="2" name="Freeform 1"/>
+          <p:cNvSpPr/>
+          <p:nvPr/>
+        </p:nvSpPr>
+        <p:spPr>
+          <a:xfrm>
+            <a:off x="0" y="180000"/>
+            <a:ext cx="720000" cy="1440000"/>
+          </a:xfrm>
+          <a:custGeom>
+            <a:avLst/>
+            <a:gdLst/>
+            <a:ahLst/>
+            <a:cxnLst/>
+            <a:rect l="l" t="t" r="r" b="b"/>
+            <a:pathLst>
+              <a:path w="720000" h="1440000">
+                <a:moveTo>
+                  <a:pt x="0" y="0"/>
+                </a:moveTo>
+                <a:lnTo>
+                  <a:pt x="75260" y="3944"/>
+                </a:lnTo>
+                <a:lnTo>
+                  <a:pt x="149696" y="15734"/>
+                </a:lnTo>
+                <a:lnTo>
+                  <a:pt x="222492" y="35239"/>
+                </a:lnTo>
+                <a:lnTo>
+                  <a:pt x="292850" y="62247"/>
+                </a:lnTo>
+                <a:lnTo>
+                  <a:pt x="360000" y="96462"/>
+                </a:lnTo>
+                <a:lnTo>
+                  <a:pt x="423205" y="137508"/>
+                </a:lnTo>
+                <a:lnTo>
+                  <a:pt x="481774" y="184936"/>
+                </a:lnTo>
+                <a:lnTo>
+                  <a:pt x="535064" y="238226"/>
+                </a:lnTo>
+                <a:lnTo>
+                  <a:pt x="582492" y="296795"/>
+                </a:lnTo>
+                <a:lnTo>
+                  <a:pt x="623538" y="360000"/>
+                </a:lnTo>
+                <a:lnTo>
+                  <a:pt x="657753" y="427150"/>
+                </a:lnTo>
+                <a:lnTo>
+                  <a:pt x="684761" y="497508"/>
+                </a:lnTo>
+                <a:lnTo>
+                  <a:pt x="704266" y="570304"/>
+                </a:lnTo>
+                <a:lnTo>
+                  <a:pt x="716056" y="644740"/>
+                </a:lnTo>
+                <a:lnTo>
+                  <a:pt x="720000" y="720000"/>
+                </a:lnTo>
+                <a:lnTo>
+                  <a:pt x="716056" y="795260"/>
+                </a:lnTo>
+                <a:lnTo>
+                  <a:pt x="704266" y="869696"/>
+                </a:lnTo>
+                <a:lnTo>
+                  <a:pt x="684761" y="942492"/>
+                </a:lnTo>
+                <a:lnTo>
+                  <a:pt x="657753" y="1012850"/>
+                </a:lnTo>
+                <a:lnTo>
+                  <a:pt x="623538" y="1080000"/>
+                </a:lnTo>
+                <a:lnTo>
+                  <a:pt x="582492" y="1143205"/>
+                </a:lnTo>
+                <a:lnTo>
+                  <a:pt x="535064" y="1201774"/>
+                </a:lnTo>
+                <a:lnTo>
+                  <a:pt x="481774" y="1255064"/>
+                </a:lnTo>
+                <a:lnTo>
+                  <a:pt x="423205" y="1302492"/>
+                </a:lnTo>
+                <a:lnTo>
+                  <a:pt x="360000" y="1343538"/>
+                </a:lnTo>
+                <a:lnTo>
+                  <a:pt x="292850" y="1377753"/>
+                </a:lnTo>
+                <a:lnTo>
+                  <a:pt x="222492" y="1404761"/>
+                </a:lnTo>
+                <a:lnTo>
+                  <a:pt x="149696" y="1424266"/>
+                </a:lnTo>
+                <a:lnTo>
+                  <a:pt x="75260" y="1436056"/>
+                </a:lnTo>
+                <a:lnTo>
+                  <a:pt x="0" y="1440000"/>
+                </a:lnTo>
+                <a:close/>
+              </a:path>
+            </a:pathLst>
+          </a:custGeom>
+          <a:solidFill>
+            <a:srgbClr val="FF8A7A"/>
+          </a:solidFill>
+          <a:ln>
+            <a:noFill/>
+          </a:ln>
+        </p:spPr>
+        <p:txBody>
+          <a:bodyPr rtlCol="0" anchor="ctr"/>
+          <a:lstStyle/>
+          <a:p>
+            <a:pPr algn="ctr"/>
+          </a:p>
+        </p:txBody>
+      </p:sp>
+      <p:sp>
+        <p:nvSpPr>
+          <p:cNvPr id="3" name="텍스트"/>
           <p:cNvSpPr txBox="1"/>
           <p:nvPr/>
         </p:nvSpPr>
         <p:spPr>
           <a:xfrm>
-            <a:off x="360000" y="201600"/>
-            <a:ext cx="2520000" cy="100800"/>
+            <a:off x="36000" y="540000"/>
+            <a:ext cx="540000" cy="720000"/>
           </a:xfrm>
           <a:prstGeom prst="rect">
             <a:avLst/>
@@ -3114,99 +3245,39 @@
           <a:noFill/>
         </p:spPr>
         <p:txBody>
-          <a:bodyPr wrap="square" lIns="0" rIns="0" tIns="0" bIns="0" anchor="t">
+          <a:bodyPr wrap="square" lIns="0" rIns="0" tIns="0" bIns="0" anchor="ctr">
             <a:spAutoFit/>
           </a:bodyPr>
           <a:lstStyle/>
           <a:p>
             <a:pPr algn="ctr">
               <a:lnSpc>
-                <a:spcPts val="1015"/>
+                <a:spcPts val="4350"/>
               </a:lnSpc>
             </a:pPr>
             <a:r>
-              <a:rPr sz="700" b="1" spc="300">
+              <a:rPr sz="3000" b="1">
                 <a:solidFill>
-                  <a:srgbClr val="6B6E84"/>
+                  <a:srgbClr val="12151C"/>
                 </a:solidFill>
                 <a:latin typeface="맑은 고딕"/>
                 <a:ea typeface="맑은 고딕"/>
               </a:rPr>
-              <a:t>상호명</a:t>
-            </a:r>
-          </a:p>
-        </p:txBody>
-      </p:sp>
-      <p:sp>
-        <p:nvSpPr>
-          <p:cNvPr id="3" name="Oval 2"/>
-          <p:cNvSpPr/>
+              <a:t>배</a:t>
+            </a:r>
+          </a:p>
+        </p:txBody>
+      </p:sp>
+      <p:sp>
+        <p:nvSpPr>
+          <p:cNvPr id="4" name="텍스트"/>
+          <p:cNvSpPr txBox="1"/>
           <p:nvPr/>
         </p:nvSpPr>
         <p:spPr>
           <a:xfrm>
-            <a:off x="1581120" y="421920"/>
-            <a:ext cx="77760" cy="103680"/>
-          </a:xfrm>
-          <a:prstGeom prst="ellipse">
-            <a:avLst/>
-          </a:prstGeom>
-          <a:noFill/>
-          <a:ln w="15120">
-            <a:solidFill>
-              <a:srgbClr val="D2D6EF"/>
-            </a:solidFill>
-          </a:ln>
-        </p:spPr>
-        <p:txBody>
-          <a:bodyPr rtlCol="0" anchor="ctr"/>
-          <a:lstStyle/>
-          <a:p>
-            <a:pPr algn="ctr"/>
-          </a:p>
-        </p:txBody>
-      </p:sp>
-      <p:sp>
-        <p:nvSpPr>
-          <p:cNvPr id="4" name="Rounded Rectangle 3"/>
-          <p:cNvSpPr/>
-          <p:nvPr/>
-        </p:nvSpPr>
-        <p:spPr>
-          <a:xfrm>
-            <a:off x="1537920" y="482400"/>
-            <a:ext cx="164160" cy="112320"/>
-          </a:xfrm>
-          <a:prstGeom prst="roundRect">
-            <a:avLst>
-              <a:gd name="adj" fmla="val 13461"/>
-            </a:avLst>
-          </a:prstGeom>
-          <a:solidFill>
-            <a:srgbClr val="38438A"/>
-          </a:solidFill>
-          <a:ln>
-            <a:noFill/>
-          </a:ln>
-        </p:spPr>
-        <p:txBody>
-          <a:bodyPr rtlCol="0" anchor="ctr"/>
-          <a:lstStyle/>
-          <a:p>
-            <a:pPr algn="ctr"/>
-          </a:p>
-        </p:txBody>
-      </p:sp>
-      <p:sp>
-        <p:nvSpPr>
-          <p:cNvPr id="5" name="텍스트"/>
-          <p:cNvSpPr txBox="1"/>
-          <p:nvPr/>
-        </p:nvSpPr>
-        <p:spPr>
-          <a:xfrm>
-            <a:off x="360000" y="684000"/>
-            <a:ext cx="2520000" cy="313692"/>
+            <a:off x="1116000" y="223200"/>
+            <a:ext cx="1872000" cy="133351"/>
           </a:xfrm>
           <a:prstGeom prst="rect">
             <a:avLst/>
@@ -3219,34 +3290,34 @@
           </a:bodyPr>
           <a:lstStyle/>
           <a:p>
-            <a:pPr algn="ctr">
+            <a:pPr algn="l">
               <a:lnSpc>
-                <a:spcPts val="2755"/>
+                <a:spcPts val="1015"/>
               </a:lnSpc>
             </a:pPr>
             <a:r>
-              <a:rPr sz="1900" b="1" spc="50">
+              <a:rPr sz="700" b="1" spc="200">
                 <a:solidFill>
-                  <a:srgbClr val="1B2041"/>
+                  <a:srgbClr val="6C4140"/>
                 </a:solidFill>
                 <a:latin typeface="맑은 고딕"/>
                 <a:ea typeface="맑은 고딕"/>
               </a:rPr>
-              <a:t>배준서</a:t>
-            </a:r>
-          </a:p>
-        </p:txBody>
-      </p:sp>
-      <p:sp>
-        <p:nvSpPr>
-          <p:cNvPr id="6" name="텍스트"/>
+              <a:t>상호명</a:t>
+            </a:r>
+          </a:p>
+        </p:txBody>
+      </p:sp>
+      <p:sp>
+        <p:nvSpPr>
+          <p:cNvPr id="5" name="텍스트"/>
           <p:cNvSpPr txBox="1"/>
           <p:nvPr/>
         </p:nvSpPr>
         <p:spPr>
           <a:xfrm>
-            <a:off x="360000" y="1051200"/>
-            <a:ext cx="2520000" cy="122400"/>
+            <a:off x="1116000" y="540000"/>
+            <a:ext cx="1872000" cy="360000"/>
           </a:xfrm>
           <a:prstGeom prst="rect">
             <a:avLst/>
@@ -3259,63 +3330,34 @@
           </a:bodyPr>
           <a:lstStyle/>
           <a:p>
-            <a:pPr algn="ctr">
+            <a:pPr algn="l">
               <a:lnSpc>
-                <a:spcPts val="1232"/>
+                <a:spcPts val="3190"/>
               </a:lnSpc>
             </a:pPr>
             <a:r>
-              <a:rPr sz="850" b="1">
+              <a:rPr sz="2200" b="1">
                 <a:solidFill>
-                  <a:srgbClr val="38438A"/>
+                  <a:srgbClr val="12151C"/>
                 </a:solidFill>
                 <a:latin typeface="맑은 고딕"/>
                 <a:ea typeface="맑은 고딕"/>
               </a:rPr>
-              <a:t>대표</a:t>
-            </a:r>
-          </a:p>
-        </p:txBody>
-      </p:sp>
-      <p:sp>
-        <p:nvSpPr>
-          <p:cNvPr id="7" name="Rectangle 6"/>
-          <p:cNvSpPr/>
+              <a:t>배준서</a:t>
+            </a:r>
+          </a:p>
+        </p:txBody>
+      </p:sp>
+      <p:sp>
+        <p:nvSpPr>
+          <p:cNvPr id="6" name="텍스트"/>
+          <p:cNvSpPr txBox="1"/>
           <p:nvPr/>
         </p:nvSpPr>
         <p:spPr>
           <a:xfrm>
-            <a:off x="1512000" y="1245600"/>
-            <a:ext cx="216000" cy="10800"/>
-          </a:xfrm>
-          <a:prstGeom prst="rect">
-            <a:avLst/>
-          </a:prstGeom>
-          <a:solidFill>
-            <a:srgbClr val="38438A"/>
-          </a:solidFill>
-          <a:ln>
-            <a:noFill/>
-          </a:ln>
-        </p:spPr>
-        <p:txBody>
-          <a:bodyPr rtlCol="0" anchor="ctr"/>
-          <a:lstStyle/>
-          <a:p>
-            <a:pPr algn="ctr"/>
-          </a:p>
-        </p:txBody>
-      </p:sp>
-      <p:sp>
-        <p:nvSpPr>
-          <p:cNvPr id="8" name="텍스트"/>
-          <p:cNvSpPr txBox="1"/>
-          <p:nvPr/>
-        </p:nvSpPr>
-        <p:spPr>
-          <a:xfrm>
-            <a:off x="360000" y="1339200"/>
-            <a:ext cx="2520000" cy="108000"/>
+            <a:off x="1116000" y="943200"/>
+            <a:ext cx="1872000" cy="171451"/>
           </a:xfrm>
           <a:prstGeom prst="rect">
             <a:avLst/>
@@ -3328,34 +3370,63 @@
           </a:bodyPr>
           <a:lstStyle/>
           <a:p>
-            <a:pPr algn="ctr">
+            <a:pPr algn="l">
               <a:lnSpc>
-                <a:spcPts val="1015"/>
+                <a:spcPts val="1305"/>
               </a:lnSpc>
             </a:pPr>
             <a:r>
-              <a:rPr sz="700" b="0">
+              <a:rPr sz="900" b="0">
                 <a:solidFill>
-                  <a:srgbClr val="1B2041"/>
+                  <a:srgbClr val="6C4140"/>
                 </a:solidFill>
                 <a:latin typeface="맑은 고딕"/>
                 <a:ea typeface="맑은 고딕"/>
               </a:rPr>
-              <a:t>010-1234-5678   ·   name@example.com</a:t>
-            </a:r>
-          </a:p>
-        </p:txBody>
-      </p:sp>
-      <p:sp>
-        <p:nvSpPr>
-          <p:cNvPr id="9" name="텍스트"/>
+              <a:t>대표</a:t>
+            </a:r>
+          </a:p>
+        </p:txBody>
+      </p:sp>
+      <p:sp>
+        <p:nvSpPr>
+          <p:cNvPr id="7" name="Rectangle 6"/>
+          <p:cNvSpPr/>
+          <p:nvPr/>
+        </p:nvSpPr>
+        <p:spPr>
+          <a:xfrm>
+            <a:off x="1116000" y="1195200"/>
+            <a:ext cx="144000" cy="18000"/>
+          </a:xfrm>
+          <a:prstGeom prst="rect">
+            <a:avLst/>
+          </a:prstGeom>
+          <a:solidFill>
+            <a:srgbClr val="FF8A7A"/>
+          </a:solidFill>
+          <a:ln>
+            <a:noFill/>
+          </a:ln>
+        </p:spPr>
+        <p:txBody>
+          <a:bodyPr rtlCol="0" anchor="ctr"/>
+          <a:lstStyle/>
+          <a:p>
+            <a:pPr algn="ctr"/>
+          </a:p>
+        </p:txBody>
+      </p:sp>
+      <p:sp>
+        <p:nvSpPr>
+          <p:cNvPr id="8" name="텍스트"/>
           <p:cNvSpPr txBox="1"/>
           <p:nvPr/>
         </p:nvSpPr>
         <p:spPr>
           <a:xfrm>
-            <a:off x="360000" y="1468800"/>
-            <a:ext cx="2520000" cy="108000"/>
+            <a:off x="1116000" y="1328400"/>
+            <a:ext cx="331200" cy="99061"/>
           </a:xfrm>
           <a:prstGeom prst="rect">
             <a:avLst/>
@@ -3368,7 +3439,47 @@
           </a:bodyPr>
           <a:lstStyle/>
           <a:p>
-            <a:pPr algn="ctr">
+            <a:pPr algn="l">
+              <a:lnSpc>
+                <a:spcPts val="754"/>
+              </a:lnSpc>
+            </a:pPr>
+            <a:r>
+              <a:rPr sz="520" b="1" spc="120">
+                <a:solidFill>
+                  <a:srgbClr val="6C4140"/>
+                </a:solidFill>
+                <a:latin typeface="맑은 고딕"/>
+                <a:ea typeface="맑은 고딕"/>
+              </a:rPr>
+              <a:t>TEL</a:t>
+            </a:r>
+          </a:p>
+        </p:txBody>
+      </p:sp>
+      <p:sp>
+        <p:nvSpPr>
+          <p:cNvPr id="9" name="텍스트"/>
+          <p:cNvSpPr txBox="1"/>
+          <p:nvPr/>
+        </p:nvSpPr>
+        <p:spPr>
+          <a:xfrm>
+            <a:off x="1447200" y="1317600"/>
+            <a:ext cx="1440000" cy="133351"/>
+          </a:xfrm>
+          <a:prstGeom prst="rect">
+            <a:avLst/>
+          </a:prstGeom>
+          <a:noFill/>
+        </p:spPr>
+        <p:txBody>
+          <a:bodyPr wrap="square" lIns="0" rIns="0" tIns="0" bIns="0" anchor="t">
+            <a:spAutoFit/>
+          </a:bodyPr>
+          <a:lstStyle/>
+          <a:p>
+            <a:pPr algn="l">
               <a:lnSpc>
                 <a:spcPts val="1015"/>
               </a:lnSpc>
@@ -3376,7 +3487,167 @@
             <a:r>
               <a:rPr sz="700" b="0">
                 <a:solidFill>
-                  <a:srgbClr val="6B6E84"/>
+                  <a:srgbClr val="12151C"/>
+                </a:solidFill>
+                <a:latin typeface="맑은 고딕"/>
+                <a:ea typeface="맑은 고딕"/>
+              </a:rPr>
+              <a:t>010-1234-5678</a:t>
+            </a:r>
+          </a:p>
+        </p:txBody>
+      </p:sp>
+      <p:sp>
+        <p:nvSpPr>
+          <p:cNvPr id="10" name="텍스트"/>
+          <p:cNvSpPr txBox="1"/>
+          <p:nvPr/>
+        </p:nvSpPr>
+        <p:spPr>
+          <a:xfrm>
+            <a:off x="1116000" y="1458000"/>
+            <a:ext cx="331200" cy="99061"/>
+          </a:xfrm>
+          <a:prstGeom prst="rect">
+            <a:avLst/>
+          </a:prstGeom>
+          <a:noFill/>
+        </p:spPr>
+        <p:txBody>
+          <a:bodyPr wrap="square" lIns="0" rIns="0" tIns="0" bIns="0" anchor="t">
+            <a:spAutoFit/>
+          </a:bodyPr>
+          <a:lstStyle/>
+          <a:p>
+            <a:pPr algn="l">
+              <a:lnSpc>
+                <a:spcPts val="754"/>
+              </a:lnSpc>
+            </a:pPr>
+            <a:r>
+              <a:rPr sz="520" b="1" spc="120">
+                <a:solidFill>
+                  <a:srgbClr val="6C4140"/>
+                </a:solidFill>
+                <a:latin typeface="맑은 고딕"/>
+                <a:ea typeface="맑은 고딕"/>
+              </a:rPr>
+              <a:t>MAIL</a:t>
+            </a:r>
+          </a:p>
+        </p:txBody>
+      </p:sp>
+      <p:sp>
+        <p:nvSpPr>
+          <p:cNvPr id="11" name="텍스트"/>
+          <p:cNvSpPr txBox="1"/>
+          <p:nvPr/>
+        </p:nvSpPr>
+        <p:spPr>
+          <a:xfrm>
+            <a:off x="1447200" y="1447200"/>
+            <a:ext cx="1440000" cy="133351"/>
+          </a:xfrm>
+          <a:prstGeom prst="rect">
+            <a:avLst/>
+          </a:prstGeom>
+          <a:noFill/>
+        </p:spPr>
+        <p:txBody>
+          <a:bodyPr wrap="square" lIns="0" rIns="0" tIns="0" bIns="0" anchor="t">
+            <a:spAutoFit/>
+          </a:bodyPr>
+          <a:lstStyle/>
+          <a:p>
+            <a:pPr algn="l">
+              <a:lnSpc>
+                <a:spcPts val="1015"/>
+              </a:lnSpc>
+            </a:pPr>
+            <a:r>
+              <a:rPr sz="700" b="0">
+                <a:solidFill>
+                  <a:srgbClr val="12151C"/>
+                </a:solidFill>
+                <a:latin typeface="맑은 고딕"/>
+                <a:ea typeface="맑은 고딕"/>
+              </a:rPr>
+              <a:t>name@example.com</a:t>
+            </a:r>
+          </a:p>
+        </p:txBody>
+      </p:sp>
+      <p:sp>
+        <p:nvSpPr>
+          <p:cNvPr id="12" name="텍스트"/>
+          <p:cNvSpPr txBox="1"/>
+          <p:nvPr/>
+        </p:nvSpPr>
+        <p:spPr>
+          <a:xfrm>
+            <a:off x="1116000" y="1587600"/>
+            <a:ext cx="331200" cy="99061"/>
+          </a:xfrm>
+          <a:prstGeom prst="rect">
+            <a:avLst/>
+          </a:prstGeom>
+          <a:noFill/>
+        </p:spPr>
+        <p:txBody>
+          <a:bodyPr wrap="square" lIns="0" rIns="0" tIns="0" bIns="0" anchor="t">
+            <a:spAutoFit/>
+          </a:bodyPr>
+          <a:lstStyle/>
+          <a:p>
+            <a:pPr algn="l">
+              <a:lnSpc>
+                <a:spcPts val="754"/>
+              </a:lnSpc>
+            </a:pPr>
+            <a:r>
+              <a:rPr sz="520" b="1" spc="120">
+                <a:solidFill>
+                  <a:srgbClr val="6C4140"/>
+                </a:solidFill>
+                <a:latin typeface="맑은 고딕"/>
+                <a:ea typeface="맑은 고딕"/>
+              </a:rPr>
+              <a:t>ADDR</a:t>
+            </a:r>
+          </a:p>
+        </p:txBody>
+      </p:sp>
+      <p:sp>
+        <p:nvSpPr>
+          <p:cNvPr id="13" name="텍스트"/>
+          <p:cNvSpPr txBox="1"/>
+          <p:nvPr/>
+        </p:nvSpPr>
+        <p:spPr>
+          <a:xfrm>
+            <a:off x="1447200" y="1576800"/>
+            <a:ext cx="1440000" cy="133351"/>
+          </a:xfrm>
+          <a:prstGeom prst="rect">
+            <a:avLst/>
+          </a:prstGeom>
+          <a:noFill/>
+        </p:spPr>
+        <p:txBody>
+          <a:bodyPr wrap="square" lIns="0" rIns="0" tIns="0" bIns="0" anchor="t">
+            <a:spAutoFit/>
+          </a:bodyPr>
+          <a:lstStyle/>
+          <a:p>
+            <a:pPr algn="l">
+              <a:lnSpc>
+                <a:spcPts val="1015"/>
+              </a:lnSpc>
+            </a:pPr>
+            <a:r>
+              <a:rPr sz="700" b="0">
+                <a:solidFill>
+                  <a:srgbClr val="12151C"/>
                 </a:solidFill>
                 <a:latin typeface="맑은 고딕"/>
                 <a:ea typeface="맑은 고딕"/>
@@ -3400,7 +3671,7 @@
     <p:bg>
       <p:bgPr>
         <a:solidFill>
-          <a:srgbClr val="FBF8F2"/>
+          <a:srgbClr val="F3F4F6"/>
         </a:solidFill>
         <a:effectLst/>
       </p:bgPr>
@@ -3414,14 +3685,43 @@
       <p:grpSpPr/>
       <p:sp>
         <p:nvSpPr>
-          <p:cNvPr id="2" name="Freeform 1"/>
+          <p:cNvPr id="2" name="Rectangle 1"/>
           <p:cNvSpPr/>
           <p:nvPr/>
         </p:nvSpPr>
         <p:spPr>
           <a:xfrm>
-            <a:off x="2016000" y="576000"/>
-            <a:ext cx="1224000" cy="1224000"/>
+            <a:off x="0" y="0"/>
+            <a:ext cx="3240000" cy="1800000"/>
+          </a:xfrm>
+          <a:prstGeom prst="rect">
+            <a:avLst/>
+          </a:prstGeom>
+          <a:solidFill>
+            <a:srgbClr val="FF8A7A"/>
+          </a:solidFill>
+          <a:ln>
+            <a:noFill/>
+          </a:ln>
+        </p:spPr>
+        <p:txBody>
+          <a:bodyPr rtlCol="0" anchor="ctr"/>
+          <a:lstStyle/>
+          <a:p>
+            <a:pPr algn="ctr"/>
+          </a:p>
+        </p:txBody>
+      </p:sp>
+      <p:sp>
+        <p:nvSpPr>
+          <p:cNvPr id="3" name="Freeform 2"/>
+          <p:cNvSpPr/>
+          <p:nvPr/>
+        </p:nvSpPr>
+        <p:spPr>
+          <a:xfrm>
+            <a:off x="2412000" y="972000"/>
+            <a:ext cx="828000" cy="828000"/>
           </a:xfrm>
           <a:custGeom>
             <a:avLst/>
@@ -3430,61 +3730,91 @@
             <a:cxnLst/>
             <a:rect l="l" t="t" r="r" b="b"/>
             <a:pathLst>
-              <a:path w="1224000" h="1224000">
+              <a:path w="828000" h="828000">
                 <a:moveTo>
-                  <a:pt x="1224000" y="1224000"/>
+                  <a:pt x="828000" y="828000"/>
                 </a:moveTo>
                 <a:lnTo>
-                  <a:pt x="0" y="1224000"/>
-                </a:lnTo>
-                <a:lnTo>
-                  <a:pt x="7696" y="1086955"/>
-                </a:lnTo>
-                <a:lnTo>
-                  <a:pt x="30688" y="951634"/>
-                </a:lnTo>
-                <a:lnTo>
-                  <a:pt x="68687" y="819738"/>
-                </a:lnTo>
-                <a:lnTo>
-                  <a:pt x="121214" y="692926"/>
-                </a:lnTo>
-                <a:lnTo>
-                  <a:pt x="187610" y="572793"/>
-                </a:lnTo>
-                <a:lnTo>
-                  <a:pt x="267038" y="460848"/>
-                </a:lnTo>
-                <a:lnTo>
-                  <a:pt x="358501" y="358501"/>
-                </a:lnTo>
-                <a:lnTo>
-                  <a:pt x="460848" y="267038"/>
-                </a:lnTo>
-                <a:lnTo>
-                  <a:pt x="572793" y="187610"/>
-                </a:lnTo>
-                <a:lnTo>
-                  <a:pt x="692926" y="121214"/>
-                </a:lnTo>
-                <a:lnTo>
-                  <a:pt x="819738" y="68687"/>
-                </a:lnTo>
-                <a:lnTo>
-                  <a:pt x="951634" y="30688"/>
-                </a:lnTo>
-                <a:lnTo>
-                  <a:pt x="1086955" y="7696"/>
-                </a:lnTo>
-                <a:lnTo>
-                  <a:pt x="1224000" y="0"/>
+                  <a:pt x="0" y="828000"/>
+                </a:lnTo>
+                <a:lnTo>
+                  <a:pt x="1773" y="773846"/>
+                </a:lnTo>
+                <a:lnTo>
+                  <a:pt x="7084" y="719924"/>
+                </a:lnTo>
+                <a:lnTo>
+                  <a:pt x="15910" y="666465"/>
+                </a:lnTo>
+                <a:lnTo>
+                  <a:pt x="28213" y="613698"/>
+                </a:lnTo>
+                <a:lnTo>
+                  <a:pt x="43942" y="561848"/>
+                </a:lnTo>
+                <a:lnTo>
+                  <a:pt x="63028" y="511138"/>
+                </a:lnTo>
+                <a:lnTo>
+                  <a:pt x="85389" y="461785"/>
+                </a:lnTo>
+                <a:lnTo>
+                  <a:pt x="110931" y="414000"/>
+                </a:lnTo>
+                <a:lnTo>
+                  <a:pt x="139543" y="367988"/>
+                </a:lnTo>
+                <a:lnTo>
+                  <a:pt x="171103" y="323946"/>
+                </a:lnTo>
+                <a:lnTo>
+                  <a:pt x="205477" y="282062"/>
+                </a:lnTo>
+                <a:lnTo>
+                  <a:pt x="242516" y="242516"/>
+                </a:lnTo>
+                <a:lnTo>
+                  <a:pt x="282062" y="205477"/>
+                </a:lnTo>
+                <a:lnTo>
+                  <a:pt x="323946" y="171103"/>
+                </a:lnTo>
+                <a:lnTo>
+                  <a:pt x="367988" y="139543"/>
+                </a:lnTo>
+                <a:lnTo>
+                  <a:pt x="414000" y="110931"/>
+                </a:lnTo>
+                <a:lnTo>
+                  <a:pt x="461785" y="85389"/>
+                </a:lnTo>
+                <a:lnTo>
+                  <a:pt x="511138" y="63028"/>
+                </a:lnTo>
+                <a:lnTo>
+                  <a:pt x="561848" y="43942"/>
+                </a:lnTo>
+                <a:lnTo>
+                  <a:pt x="613698" y="28213"/>
+                </a:lnTo>
+                <a:lnTo>
+                  <a:pt x="666465" y="15910"/>
+                </a:lnTo>
+                <a:lnTo>
+                  <a:pt x="719924" y="7084"/>
+                </a:lnTo>
+                <a:lnTo>
+                  <a:pt x="773846" y="1773"/>
+                </a:lnTo>
+                <a:lnTo>
+                  <a:pt x="828000" y="0"/>
                 </a:lnTo>
                 <a:close/>
               </a:path>
             </a:pathLst>
           </a:custGeom>
           <a:solidFill>
-            <a:srgbClr val="915B3B"/>
+            <a:srgbClr val="FFA497"/>
           </a:solidFill>
           <a:ln>
             <a:noFill/>
@@ -3500,160 +3830,14 @@
       </p:sp>
       <p:sp>
         <p:nvSpPr>
-          <p:cNvPr id="3" name="Freeform 2"/>
-          <p:cNvSpPr/>
+          <p:cNvPr id="4" name="텍스트"/>
+          <p:cNvSpPr txBox="1"/>
           <p:nvPr/>
         </p:nvSpPr>
         <p:spPr>
           <a:xfrm>
-            <a:off x="2520000" y="1080000"/>
-            <a:ext cx="720000" cy="720000"/>
-          </a:xfrm>
-          <a:custGeom>
-            <a:avLst/>
-            <a:gdLst/>
-            <a:ahLst/>
-            <a:cxnLst/>
-            <a:rect l="l" t="t" r="r" b="b"/>
-            <a:pathLst>
-              <a:path w="720000" h="720000">
-                <a:moveTo>
-                  <a:pt x="720000" y="720000"/>
-                </a:moveTo>
-                <a:lnTo>
-                  <a:pt x="0" y="720000"/>
-                </a:lnTo>
-                <a:lnTo>
-                  <a:pt x="4527" y="639386"/>
-                </a:lnTo>
-                <a:lnTo>
-                  <a:pt x="18052" y="559785"/>
-                </a:lnTo>
-                <a:lnTo>
-                  <a:pt x="40404" y="482199"/>
-                </a:lnTo>
-                <a:lnTo>
-                  <a:pt x="71302" y="407604"/>
-                </a:lnTo>
-                <a:lnTo>
-                  <a:pt x="110359" y="336937"/>
-                </a:lnTo>
-                <a:lnTo>
-                  <a:pt x="157081" y="271087"/>
-                </a:lnTo>
-                <a:lnTo>
-                  <a:pt x="210883" y="210883"/>
-                </a:lnTo>
-                <a:lnTo>
-                  <a:pt x="271087" y="157081"/>
-                </a:lnTo>
-                <a:lnTo>
-                  <a:pt x="336937" y="110359"/>
-                </a:lnTo>
-                <a:lnTo>
-                  <a:pt x="407604" y="71302"/>
-                </a:lnTo>
-                <a:lnTo>
-                  <a:pt x="482199" y="40404"/>
-                </a:lnTo>
-                <a:lnTo>
-                  <a:pt x="559785" y="18052"/>
-                </a:lnTo>
-                <a:lnTo>
-                  <a:pt x="639386" y="4527"/>
-                </a:lnTo>
-                <a:lnTo>
-                  <a:pt x="720000" y="0"/>
-                </a:lnTo>
-                <a:close/>
-              </a:path>
-            </a:pathLst>
-          </a:custGeom>
-          <a:solidFill>
-            <a:srgbClr val="E0D1C8"/>
-          </a:solidFill>
-          <a:ln>
-            <a:noFill/>
-          </a:ln>
-        </p:spPr>
-        <p:txBody>
-          <a:bodyPr rtlCol="0" anchor="ctr"/>
-          <a:lstStyle/>
-          <a:p>
-            <a:pPr algn="ctr"/>
-          </a:p>
-        </p:txBody>
-      </p:sp>
-      <p:sp>
-        <p:nvSpPr>
-          <p:cNvPr id="4" name="Oval 3"/>
-          <p:cNvSpPr/>
-          <p:nvPr/>
-        </p:nvSpPr>
-        <p:spPr>
-          <a:xfrm>
-            <a:off x="2834640" y="1380240"/>
-            <a:ext cx="90720" cy="120960"/>
-          </a:xfrm>
-          <a:prstGeom prst="ellipse">
-            <a:avLst/>
-          </a:prstGeom>
-          <a:noFill/>
-          <a:ln w="17640">
-            <a:solidFill>
-              <a:srgbClr val="737373"/>
-            </a:solidFill>
-          </a:ln>
-        </p:spPr>
-        <p:txBody>
-          <a:bodyPr rtlCol="0" anchor="ctr"/>
-          <a:lstStyle/>
-          <a:p>
-            <a:pPr algn="ctr"/>
-          </a:p>
-        </p:txBody>
-      </p:sp>
-      <p:sp>
-        <p:nvSpPr>
-          <p:cNvPr id="5" name="Rounded Rectangle 4"/>
-          <p:cNvSpPr/>
-          <p:nvPr/>
-        </p:nvSpPr>
-        <p:spPr>
-          <a:xfrm>
-            <a:off x="2784240" y="1450800"/>
-            <a:ext cx="191520" cy="131040"/>
-          </a:xfrm>
-          <a:prstGeom prst="roundRect">
-            <a:avLst>
-              <a:gd name="adj" fmla="val 13461"/>
-            </a:avLst>
-          </a:prstGeom>
-          <a:solidFill>
-            <a:srgbClr val="FFFFFF"/>
-          </a:solidFill>
-          <a:ln>
-            <a:noFill/>
-          </a:ln>
-        </p:spPr>
-        <p:txBody>
-          <a:bodyPr rtlCol="0" anchor="ctr"/>
-          <a:lstStyle/>
-          <a:p>
-            <a:pPr algn="ctr"/>
-          </a:p>
-        </p:txBody>
-      </p:sp>
-      <p:sp>
-        <p:nvSpPr>
-          <p:cNvPr id="6" name="텍스트"/>
-          <p:cNvSpPr txBox="1"/>
-          <p:nvPr/>
-        </p:nvSpPr>
-        <p:spPr>
-          <a:xfrm>
-            <a:off x="252000" y="324000"/>
-            <a:ext cx="1944000" cy="720000"/>
+            <a:off x="252000" y="432000"/>
+            <a:ext cx="2304000" cy="720000"/>
           </a:xfrm>
           <a:prstGeom prst="rect">
             <a:avLst/>
@@ -3668,49 +3852,32 @@
           <a:p>
             <a:pPr algn="l">
               <a:lnSpc>
-                <a:spcPts val="1739"/>
+                <a:spcPts val="1884"/>
               </a:lnSpc>
             </a:pPr>
             <a:r>
-              <a:rPr sz="1200" b="1">
+              <a:rPr sz="1300" b="1">
                 <a:solidFill>
-                  <a:srgbClr val="1B2041"/>
+                  <a:srgbClr val="12151C"/>
                 </a:solidFill>
-                <a:latin typeface="바탕"/>
-                <a:ea typeface="바탕"/>
+                <a:latin typeface="맑은 고딕"/>
+                <a:ea typeface="맑은 고딕"/>
               </a:rPr>
-              <a:t>오늘도 반듯하게</a:t>
-            </a:r>
-          </a:p>
-          <a:p>
-            <a:pPr algn="l">
-              <a:lnSpc>
-                <a:spcPts val="1739"/>
-              </a:lnSpc>
-            </a:pPr>
-            <a:r>
-              <a:rPr sz="1200" b="1">
-                <a:solidFill>
-                  <a:srgbClr val="1B2041"/>
-                </a:solidFill>
-                <a:latin typeface="바탕"/>
-                <a:ea typeface="바탕"/>
-              </a:rPr>
-              <a:t>다림질합니다</a:t>
-            </a:r>
-          </a:p>
-        </p:txBody>
-      </p:sp>
-      <p:sp>
-        <p:nvSpPr>
-          <p:cNvPr id="7" name="텍스트"/>
+              <a:t>오늘도 반듯하게 다림질합니다</a:t>
+            </a:r>
+          </a:p>
+        </p:txBody>
+      </p:sp>
+      <p:sp>
+        <p:nvSpPr>
+          <p:cNvPr id="5" name="텍스트"/>
           <p:cNvSpPr txBox="1"/>
           <p:nvPr/>
         </p:nvSpPr>
         <p:spPr>
           <a:xfrm>
             <a:off x="252000" y="1476000"/>
-            <a:ext cx="1440000" cy="108000"/>
+            <a:ext cx="1800000" cy="133351"/>
           </a:xfrm>
           <a:prstGeom prst="rect">
             <a:avLst/>
@@ -3725,13 +3892,13 @@
           <a:p>
             <a:pPr algn="l">
               <a:lnSpc>
-                <a:spcPts val="1087"/>
+                <a:spcPts val="1015"/>
               </a:lnSpc>
             </a:pPr>
             <a:r>
-              <a:rPr sz="750" b="1" spc="200">
+              <a:rPr sz="700" b="1" spc="200">
                 <a:solidFill>
-                  <a:srgbClr val="696C7F"/>
+                  <a:srgbClr val="12151C"/>
                 </a:solidFill>
                 <a:latin typeface="맑은 고딕"/>
                 <a:ea typeface="맑은 고딕"/>

--- a/public/fun/cards/life/life-22.pptx
+++ b/public/fun/cards/life/life-22.pptx
@@ -3105,8 +3105,8 @@
         </p:nvSpPr>
         <p:spPr>
           <a:xfrm>
-            <a:off x="0" y="180000"/>
-            <a:ext cx="720000" cy="1440000"/>
+            <a:off x="0" y="216000"/>
+            <a:ext cx="684000" cy="1368000"/>
           </a:xfrm>
           <a:custGeom>
             <a:avLst/>
@@ -3115,99 +3115,99 @@
             <a:cxnLst/>
             <a:rect l="l" t="t" r="r" b="b"/>
             <a:pathLst>
-              <a:path w="720000" h="1440000">
+              <a:path w="684000" h="1368000">
                 <a:moveTo>
                   <a:pt x="0" y="0"/>
                 </a:moveTo>
                 <a:lnTo>
-                  <a:pt x="75260" y="3944"/>
+                  <a:pt x="71497" y="3747"/>
                 </a:lnTo>
                 <a:lnTo>
-                  <a:pt x="149696" y="15734"/>
+                  <a:pt x="142212" y="14947"/>
                 </a:lnTo>
                 <a:lnTo>
-                  <a:pt x="222492" y="35239"/>
+                  <a:pt x="211368" y="33477"/>
                 </a:lnTo>
                 <a:lnTo>
-                  <a:pt x="292850" y="62247"/>
+                  <a:pt x="278208" y="59135"/>
                 </a:lnTo>
                 <a:lnTo>
-                  <a:pt x="360000" y="96462"/>
+                  <a:pt x="342000" y="91639"/>
                 </a:lnTo>
                 <a:lnTo>
-                  <a:pt x="423205" y="137508"/>
+                  <a:pt x="402045" y="130632"/>
                 </a:lnTo>
                 <a:lnTo>
-                  <a:pt x="481774" y="184936"/>
+                  <a:pt x="457685" y="175689"/>
                 </a:lnTo>
                 <a:lnTo>
-                  <a:pt x="535064" y="238226"/>
+                  <a:pt x="508311" y="226315"/>
                 </a:lnTo>
                 <a:lnTo>
-                  <a:pt x="582492" y="296795"/>
+                  <a:pt x="553368" y="281955"/>
                 </a:lnTo>
                 <a:lnTo>
-                  <a:pt x="623538" y="360000"/>
+                  <a:pt x="592361" y="342000"/>
                 </a:lnTo>
                 <a:lnTo>
-                  <a:pt x="657753" y="427150"/>
+                  <a:pt x="624865" y="405792"/>
                 </a:lnTo>
                 <a:lnTo>
-                  <a:pt x="684761" y="497508"/>
+                  <a:pt x="650523" y="472632"/>
                 </a:lnTo>
                 <a:lnTo>
-                  <a:pt x="704266" y="570304"/>
+                  <a:pt x="669053" y="541788"/>
                 </a:lnTo>
                 <a:lnTo>
-                  <a:pt x="716056" y="644740"/>
+                  <a:pt x="680253" y="612503"/>
                 </a:lnTo>
                 <a:lnTo>
-                  <a:pt x="720000" y="720000"/>
+                  <a:pt x="684000" y="684000"/>
                 </a:lnTo>
                 <a:lnTo>
-                  <a:pt x="716056" y="795260"/>
+                  <a:pt x="680253" y="755497"/>
                 </a:lnTo>
                 <a:lnTo>
-                  <a:pt x="704266" y="869696"/>
+                  <a:pt x="669053" y="826212"/>
                 </a:lnTo>
                 <a:lnTo>
-                  <a:pt x="684761" y="942492"/>
+                  <a:pt x="650523" y="895368"/>
                 </a:lnTo>
                 <a:lnTo>
-                  <a:pt x="657753" y="1012850"/>
+                  <a:pt x="624865" y="962208"/>
                 </a:lnTo>
                 <a:lnTo>
-                  <a:pt x="623538" y="1080000"/>
+                  <a:pt x="592361" y="1026000"/>
                 </a:lnTo>
                 <a:lnTo>
-                  <a:pt x="582492" y="1143205"/>
+                  <a:pt x="553368" y="1086045"/>
                 </a:lnTo>
                 <a:lnTo>
-                  <a:pt x="535064" y="1201774"/>
+                  <a:pt x="508311" y="1141685"/>
                 </a:lnTo>
                 <a:lnTo>
-                  <a:pt x="481774" y="1255064"/>
+                  <a:pt x="457685" y="1192311"/>
                 </a:lnTo>
                 <a:lnTo>
-                  <a:pt x="423205" y="1302492"/>
+                  <a:pt x="402045" y="1237368"/>
                 </a:lnTo>
                 <a:lnTo>
-                  <a:pt x="360000" y="1343538"/>
+                  <a:pt x="342000" y="1276361"/>
                 </a:lnTo>
                 <a:lnTo>
-                  <a:pt x="292850" y="1377753"/>
+                  <a:pt x="278208" y="1308865"/>
                 </a:lnTo>
                 <a:lnTo>
-                  <a:pt x="222492" y="1404761"/>
+                  <a:pt x="211368" y="1334523"/>
                 </a:lnTo>
                 <a:lnTo>
-                  <a:pt x="149696" y="1424266"/>
+                  <a:pt x="142212" y="1353053"/>
                 </a:lnTo>
                 <a:lnTo>
-                  <a:pt x="75260" y="1436056"/>
+                  <a:pt x="71497" y="1364253"/>
                 </a:lnTo>
                 <a:lnTo>
-                  <a:pt x="0" y="1440000"/>
+                  <a:pt x="0" y="1368000"/>
                 </a:lnTo>
                 <a:close/>
               </a:path>
@@ -3230,14 +3230,72 @@
       </p:sp>
       <p:sp>
         <p:nvSpPr>
-          <p:cNvPr id="3" name="텍스트"/>
+          <p:cNvPr id="3" name="Oval 2"/>
+          <p:cNvSpPr/>
+          <p:nvPr/>
+        </p:nvSpPr>
+        <p:spPr>
+          <a:xfrm>
+            <a:off x="-432000" y="468000"/>
+            <a:ext cx="864000" cy="864000"/>
+          </a:xfrm>
+          <a:prstGeom prst="ellipse">
+            <a:avLst/>
+          </a:prstGeom>
+          <a:noFill/>
+          <a:ln w="4320">
+            <a:solidFill>
+              <a:srgbClr val="12151C"/>
+            </a:solidFill>
+          </a:ln>
+        </p:spPr>
+        <p:txBody>
+          <a:bodyPr rtlCol="0" anchor="ctr"/>
+          <a:lstStyle/>
+          <a:p>
+            <a:pPr algn="ctr"/>
+          </a:p>
+        </p:txBody>
+      </p:sp>
+      <p:sp>
+        <p:nvSpPr>
+          <p:cNvPr id="4" name="Oval 3"/>
+          <p:cNvSpPr/>
+          <p:nvPr/>
+        </p:nvSpPr>
+        <p:spPr>
+          <a:xfrm>
+            <a:off x="-252000" y="648000"/>
+            <a:ext cx="504000" cy="504000"/>
+          </a:xfrm>
+          <a:prstGeom prst="ellipse">
+            <a:avLst/>
+          </a:prstGeom>
+          <a:noFill/>
+          <a:ln w="4320">
+            <a:solidFill>
+              <a:srgbClr val="12151C"/>
+            </a:solidFill>
+          </a:ln>
+        </p:spPr>
+        <p:txBody>
+          <a:bodyPr rtlCol="0" anchor="ctr"/>
+          <a:lstStyle/>
+          <a:p>
+            <a:pPr algn="ctr"/>
+          </a:p>
+        </p:txBody>
+      </p:sp>
+      <p:sp>
+        <p:nvSpPr>
+          <p:cNvPr id="5" name="텍스트"/>
           <p:cNvSpPr txBox="1"/>
           <p:nvPr/>
         </p:nvSpPr>
         <p:spPr>
           <a:xfrm>
-            <a:off x="36000" y="540000"/>
-            <a:ext cx="540000" cy="720000"/>
+            <a:off x="86400" y="612000"/>
+            <a:ext cx="324000" cy="576000"/>
           </a:xfrm>
           <a:prstGeom prst="rect">
             <a:avLst/>
@@ -3252,32 +3310,32 @@
           <a:p>
             <a:pPr algn="ctr">
               <a:lnSpc>
-                <a:spcPts val="4350"/>
+                <a:spcPts val="1450"/>
               </a:lnSpc>
             </a:pPr>
             <a:r>
-              <a:rPr sz="3000" b="1">
+              <a:rPr sz="1000" b="1">
                 <a:solidFill>
                   <a:srgbClr val="12151C"/>
                 </a:solidFill>
                 <a:latin typeface="맑은 고딕"/>
                 <a:ea typeface="맑은 고딕"/>
               </a:rPr>
-              <a:t>배</a:t>
-            </a:r>
-          </a:p>
-        </p:txBody>
-      </p:sp>
-      <p:sp>
-        <p:nvSpPr>
-          <p:cNvPr id="4" name="텍스트"/>
+              <a:t>상</a:t>
+            </a:r>
+          </a:p>
+        </p:txBody>
+      </p:sp>
+      <p:sp>
+        <p:nvSpPr>
+          <p:cNvPr id="6" name="텍스트"/>
           <p:cNvSpPr txBox="1"/>
           <p:nvPr/>
         </p:nvSpPr>
         <p:spPr>
           <a:xfrm>
-            <a:off x="1116000" y="223200"/>
-            <a:ext cx="1872000" cy="133351"/>
+            <a:off x="1116000" y="252000"/>
+            <a:ext cx="1872000" cy="123826"/>
           </a:xfrm>
           <a:prstGeom prst="rect">
             <a:avLst/>
@@ -3292,11 +3350,11 @@
           <a:p>
             <a:pPr algn="l">
               <a:lnSpc>
-                <a:spcPts val="1015"/>
+                <a:spcPts val="942"/>
               </a:lnSpc>
             </a:pPr>
             <a:r>
-              <a:rPr sz="700" b="1" spc="200">
+              <a:rPr sz="650" b="1" spc="220">
                 <a:solidFill>
                   <a:srgbClr val="6C4140"/>
                 </a:solidFill>
@@ -3308,16 +3366,37 @@
           </a:p>
         </p:txBody>
       </p:sp>
-      <p:sp>
-        <p:nvSpPr>
-          <p:cNvPr id="5" name="텍스트"/>
+      <p:cxnSp>
+        <p:nvCxnSpPr>
+          <p:cNvPr id="7" name="Connector 6"/>
+          <p:cNvCxnSpPr/>
+          <p:nvPr/>
+        </p:nvCxnSpPr>
+        <p:spPr>
+          <a:xfrm>
+            <a:off x="1116000" y="424800"/>
+            <a:ext cx="1872000" cy="0"/>
+          </a:xfrm>
+          <a:prstGeom prst="line">
+            <a:avLst/>
+          </a:prstGeom>
+          <a:ln w="3600">
+            <a:solidFill>
+              <a:srgbClr val="FFDEDA"/>
+            </a:solidFill>
+          </a:ln>
+        </p:spPr>
+      </p:cxnSp>
+      <p:sp>
+        <p:nvSpPr>
+          <p:cNvPr id="8" name="텍스트"/>
           <p:cNvSpPr txBox="1"/>
           <p:nvPr/>
         </p:nvSpPr>
         <p:spPr>
           <a:xfrm>
-            <a:off x="1116000" y="540000"/>
-            <a:ext cx="1872000" cy="360000"/>
+            <a:off x="1116000" y="648000"/>
+            <a:ext cx="1800000" cy="237600"/>
           </a:xfrm>
           <a:prstGeom prst="rect">
             <a:avLst/>
@@ -3332,11 +3411,11 @@
           <a:p>
             <a:pPr algn="l">
               <a:lnSpc>
-                <a:spcPts val="3190"/>
+                <a:spcPts val="1957"/>
               </a:lnSpc>
             </a:pPr>
             <a:r>
-              <a:rPr sz="2200" b="1">
+              <a:rPr sz="1350" b="1" spc="120">
                 <a:solidFill>
                   <a:srgbClr val="12151C"/>
                 </a:solidFill>
@@ -3350,14 +3429,14 @@
       </p:sp>
       <p:sp>
         <p:nvSpPr>
-          <p:cNvPr id="6" name="텍스트"/>
+          <p:cNvPr id="9" name="텍스트"/>
           <p:cNvSpPr txBox="1"/>
           <p:nvPr/>
         </p:nvSpPr>
         <p:spPr>
           <a:xfrm>
-            <a:off x="1116000" y="943200"/>
-            <a:ext cx="1872000" cy="171451"/>
+            <a:off x="1116000" y="900000"/>
+            <a:ext cx="1800000" cy="133351"/>
           </a:xfrm>
           <a:prstGeom prst="rect">
             <a:avLst/>
@@ -3372,11 +3451,11 @@
           <a:p>
             <a:pPr algn="l">
               <a:lnSpc>
-                <a:spcPts val="1305"/>
+                <a:spcPts val="1015"/>
               </a:lnSpc>
             </a:pPr>
             <a:r>
-              <a:rPr sz="900" b="0">
+              <a:rPr sz="700" b="0" spc="60">
                 <a:solidFill>
                   <a:srgbClr val="6C4140"/>
                 </a:solidFill>
@@ -3388,45 +3467,37 @@
           </a:p>
         </p:txBody>
       </p:sp>
-      <p:sp>
-        <p:nvSpPr>
-          <p:cNvPr id="7" name="Rectangle 6"/>
-          <p:cNvSpPr/>
+      <p:cxnSp>
+        <p:nvCxnSpPr>
+          <p:cNvPr id="10" name="Connector 9"/>
+          <p:cNvCxnSpPr/>
           <p:nvPr/>
-        </p:nvSpPr>
-        <p:spPr>
-          <a:xfrm>
-            <a:off x="1116000" y="1195200"/>
-            <a:ext cx="144000" cy="18000"/>
-          </a:xfrm>
-          <a:prstGeom prst="rect">
+        </p:nvCxnSpPr>
+        <p:spPr>
+          <a:xfrm>
+            <a:off x="1116000" y="1267200"/>
+            <a:ext cx="1872000" cy="0"/>
+          </a:xfrm>
+          <a:prstGeom prst="line">
             <a:avLst/>
           </a:prstGeom>
-          <a:solidFill>
-            <a:srgbClr val="FF8A7A"/>
-          </a:solidFill>
-          <a:ln>
-            <a:noFill/>
+          <a:ln w="3600">
+            <a:solidFill>
+              <a:srgbClr val="FFDEDA"/>
+            </a:solidFill>
           </a:ln>
         </p:spPr>
-        <p:txBody>
-          <a:bodyPr rtlCol="0" anchor="ctr"/>
-          <a:lstStyle/>
-          <a:p>
-            <a:pPr algn="ctr"/>
-          </a:p>
-        </p:txBody>
-      </p:sp>
-      <p:sp>
-        <p:nvSpPr>
-          <p:cNvPr id="8" name="텍스트"/>
+      </p:cxnSp>
+      <p:sp>
+        <p:nvSpPr>
+          <p:cNvPr id="11" name="텍스트"/>
           <p:cNvSpPr txBox="1"/>
           <p:nvPr/>
         </p:nvSpPr>
         <p:spPr>
           <a:xfrm>
-            <a:off x="1116000" y="1328400"/>
-            <a:ext cx="331200" cy="99061"/>
+            <a:off x="1116000" y="1357200"/>
+            <a:ext cx="331200" cy="91441"/>
           </a:xfrm>
           <a:prstGeom prst="rect">
             <a:avLst/>
@@ -3441,11 +3512,11 @@
           <a:p>
             <a:pPr algn="l">
               <a:lnSpc>
-                <a:spcPts val="754"/>
+                <a:spcPts val="696"/>
               </a:lnSpc>
             </a:pPr>
             <a:r>
-              <a:rPr sz="520" b="1" spc="120">
+              <a:rPr sz="480" b="1" spc="140">
                 <a:solidFill>
                   <a:srgbClr val="6C4140"/>
                 </a:solidFill>
@@ -3459,14 +3530,14 @@
       </p:sp>
       <p:sp>
         <p:nvSpPr>
-          <p:cNvPr id="9" name="텍스트"/>
+          <p:cNvPr id="12" name="텍스트"/>
           <p:cNvSpPr txBox="1"/>
           <p:nvPr/>
         </p:nvSpPr>
         <p:spPr>
           <a:xfrm>
-            <a:off x="1447200" y="1317600"/>
-            <a:ext cx="1440000" cy="133351"/>
+            <a:off x="1447200" y="1346400"/>
+            <a:ext cx="1188000" cy="123826"/>
           </a:xfrm>
           <a:prstGeom prst="rect">
             <a:avLst/>
@@ -3481,11 +3552,11 @@
           <a:p>
             <a:pPr algn="l">
               <a:lnSpc>
-                <a:spcPts val="1015"/>
+                <a:spcPts val="942"/>
               </a:lnSpc>
             </a:pPr>
             <a:r>
-              <a:rPr sz="700" b="0">
+              <a:rPr sz="650" b="0">
                 <a:solidFill>
                   <a:srgbClr val="12151C"/>
                 </a:solidFill>
@@ -3499,14 +3570,14 @@
       </p:sp>
       <p:sp>
         <p:nvSpPr>
-          <p:cNvPr id="10" name="텍스트"/>
+          <p:cNvPr id="13" name="텍스트"/>
           <p:cNvSpPr txBox="1"/>
           <p:nvPr/>
         </p:nvSpPr>
         <p:spPr>
           <a:xfrm>
-            <a:off x="1116000" y="1458000"/>
-            <a:ext cx="331200" cy="99061"/>
+            <a:off x="1116000" y="1479600"/>
+            <a:ext cx="331200" cy="91441"/>
           </a:xfrm>
           <a:prstGeom prst="rect">
             <a:avLst/>
@@ -3521,11 +3592,11 @@
           <a:p>
             <a:pPr algn="l">
               <a:lnSpc>
-                <a:spcPts val="754"/>
+                <a:spcPts val="696"/>
               </a:lnSpc>
             </a:pPr>
             <a:r>
-              <a:rPr sz="520" b="1" spc="120">
+              <a:rPr sz="480" b="1" spc="140">
                 <a:solidFill>
                   <a:srgbClr val="6C4140"/>
                 </a:solidFill>
@@ -3539,14 +3610,14 @@
       </p:sp>
       <p:sp>
         <p:nvSpPr>
-          <p:cNvPr id="11" name="텍스트"/>
+          <p:cNvPr id="14" name="텍스트"/>
           <p:cNvSpPr txBox="1"/>
           <p:nvPr/>
         </p:nvSpPr>
         <p:spPr>
           <a:xfrm>
-            <a:off x="1447200" y="1447200"/>
-            <a:ext cx="1440000" cy="133351"/>
+            <a:off x="1447200" y="1468800"/>
+            <a:ext cx="1188000" cy="123826"/>
           </a:xfrm>
           <a:prstGeom prst="rect">
             <a:avLst/>
@@ -3561,11 +3632,11 @@
           <a:p>
             <a:pPr algn="l">
               <a:lnSpc>
-                <a:spcPts val="1015"/>
+                <a:spcPts val="942"/>
               </a:lnSpc>
             </a:pPr>
             <a:r>
-              <a:rPr sz="700" b="0">
+              <a:rPr sz="650" b="0">
                 <a:solidFill>
                   <a:srgbClr val="12151C"/>
                 </a:solidFill>
@@ -3579,14 +3650,14 @@
       </p:sp>
       <p:sp>
         <p:nvSpPr>
-          <p:cNvPr id="12" name="텍스트"/>
+          <p:cNvPr id="15" name="텍스트"/>
           <p:cNvSpPr txBox="1"/>
           <p:nvPr/>
         </p:nvSpPr>
         <p:spPr>
           <a:xfrm>
-            <a:off x="1116000" y="1587600"/>
-            <a:ext cx="331200" cy="99061"/>
+            <a:off x="1116000" y="1602000"/>
+            <a:ext cx="331200" cy="91441"/>
           </a:xfrm>
           <a:prstGeom prst="rect">
             <a:avLst/>
@@ -3601,11 +3672,11 @@
           <a:p>
             <a:pPr algn="l">
               <a:lnSpc>
-                <a:spcPts val="754"/>
+                <a:spcPts val="696"/>
               </a:lnSpc>
             </a:pPr>
             <a:r>
-              <a:rPr sz="520" b="1" spc="120">
+              <a:rPr sz="480" b="1" spc="140">
                 <a:solidFill>
                   <a:srgbClr val="6C4140"/>
                 </a:solidFill>
@@ -3619,14 +3690,14 @@
       </p:sp>
       <p:sp>
         <p:nvSpPr>
-          <p:cNvPr id="13" name="텍스트"/>
+          <p:cNvPr id="16" name="텍스트"/>
           <p:cNvSpPr txBox="1"/>
           <p:nvPr/>
         </p:nvSpPr>
         <p:spPr>
           <a:xfrm>
-            <a:off x="1447200" y="1576800"/>
-            <a:ext cx="1440000" cy="133351"/>
+            <a:off x="1447200" y="1591200"/>
+            <a:ext cx="1188000" cy="123826"/>
           </a:xfrm>
           <a:prstGeom prst="rect">
             <a:avLst/>
@@ -3641,11 +3712,11 @@
           <a:p>
             <a:pPr algn="l">
               <a:lnSpc>
-                <a:spcPts val="1015"/>
+                <a:spcPts val="942"/>
               </a:lnSpc>
             </a:pPr>
             <a:r>
-              <a:rPr sz="700" b="0">
+              <a:rPr sz="650" b="0">
                 <a:solidFill>
                   <a:srgbClr val="12151C"/>
                 </a:solidFill>
@@ -3685,14 +3756,54 @@
       <p:grpSpPr/>
       <p:sp>
         <p:nvSpPr>
-          <p:cNvPr id="2" name="Rectangle 1"/>
+          <p:cNvPr id="2" name="텍스트"/>
+          <p:cNvSpPr txBox="1"/>
+          <p:nvPr/>
+        </p:nvSpPr>
+        <p:spPr>
+          <a:xfrm>
+            <a:off x="252000" y="252000"/>
+            <a:ext cx="1080000" cy="99061"/>
+          </a:xfrm>
+          <a:prstGeom prst="rect">
+            <a:avLst/>
+          </a:prstGeom>
+          <a:noFill/>
+        </p:spPr>
+        <p:txBody>
+          <a:bodyPr wrap="square" lIns="0" rIns="0" tIns="0" bIns="0" anchor="t">
+            <a:spAutoFit/>
+          </a:bodyPr>
+          <a:lstStyle/>
+          <a:p>
+            <a:pPr algn="l">
+              <a:lnSpc>
+                <a:spcPts val="754"/>
+              </a:lnSpc>
+            </a:pPr>
+            <a:r>
+              <a:rPr sz="520" b="1" spc="240">
+                <a:solidFill>
+                  <a:srgbClr val="6B7280"/>
+                </a:solidFill>
+                <a:latin typeface="맑은 고딕"/>
+                <a:ea typeface="맑은 고딕"/>
+              </a:rPr>
+              <a:t>취급 품목</a:t>
+            </a:r>
+          </a:p>
+        </p:txBody>
+      </p:sp>
+      <p:sp>
+        <p:nvSpPr>
+          <p:cNvPr id="3" name="Rectangle 2"/>
           <p:cNvSpPr/>
           <p:nvPr/>
         </p:nvSpPr>
         <p:spPr>
           <a:xfrm>
-            <a:off x="0" y="0"/>
-            <a:ext cx="3240000" cy="1800000"/>
+            <a:off x="252000" y="352800"/>
+            <a:ext cx="108000" cy="14400"/>
           </a:xfrm>
           <a:prstGeom prst="rect">
             <a:avLst/>
@@ -3712,132 +3823,37 @@
           </a:p>
         </p:txBody>
       </p:sp>
-      <p:sp>
-        <p:nvSpPr>
-          <p:cNvPr id="3" name="Freeform 2"/>
-          <p:cNvSpPr/>
+      <p:cxnSp>
+        <p:nvCxnSpPr>
+          <p:cNvPr id="4" name="Connector 3"/>
+          <p:cNvCxnSpPr/>
           <p:nvPr/>
-        </p:nvSpPr>
-        <p:spPr>
-          <a:xfrm>
-            <a:off x="2412000" y="972000"/>
-            <a:ext cx="828000" cy="828000"/>
-          </a:xfrm>
-          <a:custGeom>
+        </p:nvCxnSpPr>
+        <p:spPr>
+          <a:xfrm>
+            <a:off x="252000" y="453600"/>
+            <a:ext cx="1512000" cy="0"/>
+          </a:xfrm>
+          <a:prstGeom prst="line">
             <a:avLst/>
-            <a:gdLst/>
-            <a:ahLst/>
-            <a:cxnLst/>
-            <a:rect l="l" t="t" r="r" b="b"/>
-            <a:pathLst>
-              <a:path w="828000" h="828000">
-                <a:moveTo>
-                  <a:pt x="828000" y="828000"/>
-                </a:moveTo>
-                <a:lnTo>
-                  <a:pt x="0" y="828000"/>
-                </a:lnTo>
-                <a:lnTo>
-                  <a:pt x="1773" y="773846"/>
-                </a:lnTo>
-                <a:lnTo>
-                  <a:pt x="7084" y="719924"/>
-                </a:lnTo>
-                <a:lnTo>
-                  <a:pt x="15910" y="666465"/>
-                </a:lnTo>
-                <a:lnTo>
-                  <a:pt x="28213" y="613698"/>
-                </a:lnTo>
-                <a:lnTo>
-                  <a:pt x="43942" y="561848"/>
-                </a:lnTo>
-                <a:lnTo>
-                  <a:pt x="63028" y="511138"/>
-                </a:lnTo>
-                <a:lnTo>
-                  <a:pt x="85389" y="461785"/>
-                </a:lnTo>
-                <a:lnTo>
-                  <a:pt x="110931" y="414000"/>
-                </a:lnTo>
-                <a:lnTo>
-                  <a:pt x="139543" y="367988"/>
-                </a:lnTo>
-                <a:lnTo>
-                  <a:pt x="171103" y="323946"/>
-                </a:lnTo>
-                <a:lnTo>
-                  <a:pt x="205477" y="282062"/>
-                </a:lnTo>
-                <a:lnTo>
-                  <a:pt x="242516" y="242516"/>
-                </a:lnTo>
-                <a:lnTo>
-                  <a:pt x="282062" y="205477"/>
-                </a:lnTo>
-                <a:lnTo>
-                  <a:pt x="323946" y="171103"/>
-                </a:lnTo>
-                <a:lnTo>
-                  <a:pt x="367988" y="139543"/>
-                </a:lnTo>
-                <a:lnTo>
-                  <a:pt x="414000" y="110931"/>
-                </a:lnTo>
-                <a:lnTo>
-                  <a:pt x="461785" y="85389"/>
-                </a:lnTo>
-                <a:lnTo>
-                  <a:pt x="511138" y="63028"/>
-                </a:lnTo>
-                <a:lnTo>
-                  <a:pt x="561848" y="43942"/>
-                </a:lnTo>
-                <a:lnTo>
-                  <a:pt x="613698" y="28213"/>
-                </a:lnTo>
-                <a:lnTo>
-                  <a:pt x="666465" y="15910"/>
-                </a:lnTo>
-                <a:lnTo>
-                  <a:pt x="719924" y="7084"/>
-                </a:lnTo>
-                <a:lnTo>
-                  <a:pt x="773846" y="1773"/>
-                </a:lnTo>
-                <a:lnTo>
-                  <a:pt x="828000" y="0"/>
-                </a:lnTo>
-                <a:close/>
-              </a:path>
-            </a:pathLst>
-          </a:custGeom>
-          <a:solidFill>
-            <a:srgbClr val="FFA497"/>
-          </a:solidFill>
-          <a:ln>
-            <a:noFill/>
+          </a:prstGeom>
+          <a:ln w="3600">
+            <a:solidFill>
+              <a:srgbClr val="DCDFE4"/>
+            </a:solidFill>
           </a:ln>
         </p:spPr>
-        <p:txBody>
-          <a:bodyPr rtlCol="0" anchor="ctr"/>
-          <a:lstStyle/>
-          <a:p>
-            <a:pPr algn="ctr"/>
-          </a:p>
-        </p:txBody>
-      </p:sp>
-      <p:sp>
-        <p:nvSpPr>
-          <p:cNvPr id="4" name="텍스트"/>
+      </p:cxnSp>
+      <p:sp>
+        <p:nvSpPr>
+          <p:cNvPr id="5" name="텍스트"/>
           <p:cNvSpPr txBox="1"/>
           <p:nvPr/>
         </p:nvSpPr>
         <p:spPr>
           <a:xfrm>
-            <a:off x="252000" y="432000"/>
-            <a:ext cx="2304000" cy="720000"/>
+            <a:off x="252000" y="507600"/>
+            <a:ext cx="216000" cy="95251"/>
           </a:xfrm>
           <a:prstGeom prst="rect">
             <a:avLst/>
@@ -3852,32 +3868,133 @@
           <a:p>
             <a:pPr algn="l">
               <a:lnSpc>
-                <a:spcPts val="1884"/>
+                <a:spcPts val="725"/>
               </a:lnSpc>
             </a:pPr>
             <a:r>
-              <a:rPr sz="1300" b="1">
+              <a:rPr sz="500" b="1" spc="100">
+                <a:solidFill>
+                  <a:srgbClr val="6B7280"/>
+                </a:solidFill>
+                <a:latin typeface="맑은 고딕"/>
+                <a:ea typeface="맑은 고딕"/>
+              </a:rPr>
+              <a:t>01</a:t>
+            </a:r>
+          </a:p>
+        </p:txBody>
+      </p:sp>
+      <p:sp>
+        <p:nvSpPr>
+          <p:cNvPr id="6" name="텍스트"/>
+          <p:cNvSpPr txBox="1"/>
+          <p:nvPr/>
+        </p:nvSpPr>
+        <p:spPr>
+          <a:xfrm>
+            <a:off x="489600" y="496800"/>
+            <a:ext cx="1260000" cy="133351"/>
+          </a:xfrm>
+          <a:prstGeom prst="rect">
+            <a:avLst/>
+          </a:prstGeom>
+          <a:noFill/>
+        </p:spPr>
+        <p:txBody>
+          <a:bodyPr wrap="square" lIns="0" rIns="0" tIns="0" bIns="0" anchor="t">
+            <a:spAutoFit/>
+          </a:bodyPr>
+          <a:lstStyle/>
+          <a:p>
+            <a:pPr algn="l">
+              <a:lnSpc>
+                <a:spcPts val="1015"/>
+              </a:lnSpc>
+            </a:pPr>
+            <a:r>
+              <a:rPr sz="700" b="0">
                 <a:solidFill>
                   <a:srgbClr val="12151C"/>
                 </a:solidFill>
                 <a:latin typeface="맑은 고딕"/>
                 <a:ea typeface="맑은 고딕"/>
               </a:rPr>
-              <a:t>오늘도 반듯하게 다림질합니다</a:t>
-            </a:r>
-          </a:p>
-        </p:txBody>
-      </p:sp>
-      <p:sp>
-        <p:nvSpPr>
-          <p:cNvPr id="5" name="텍스트"/>
+              <a:t>생화 · 꽃다발</a:t>
+            </a:r>
+          </a:p>
+        </p:txBody>
+      </p:sp>
+      <p:cxnSp>
+        <p:nvCxnSpPr>
+          <p:cNvPr id="7" name="Connector 6"/>
+          <p:cNvCxnSpPr/>
+          <p:nvPr/>
+        </p:nvCxnSpPr>
+        <p:spPr>
+          <a:xfrm>
+            <a:off x="252000" y="640800"/>
+            <a:ext cx="1512000" cy="0"/>
+          </a:xfrm>
+          <a:prstGeom prst="line">
+            <a:avLst/>
+          </a:prstGeom>
+          <a:ln w="3600">
+            <a:solidFill>
+              <a:srgbClr val="DCDFE4"/>
+            </a:solidFill>
+          </a:ln>
+        </p:spPr>
+      </p:cxnSp>
+      <p:sp>
+        <p:nvSpPr>
+          <p:cNvPr id="8" name="텍스트"/>
           <p:cNvSpPr txBox="1"/>
           <p:nvPr/>
         </p:nvSpPr>
         <p:spPr>
           <a:xfrm>
-            <a:off x="252000" y="1476000"/>
-            <a:ext cx="1800000" cy="133351"/>
+            <a:off x="252000" y="694800"/>
+            <a:ext cx="216000" cy="95251"/>
+          </a:xfrm>
+          <a:prstGeom prst="rect">
+            <a:avLst/>
+          </a:prstGeom>
+          <a:noFill/>
+        </p:spPr>
+        <p:txBody>
+          <a:bodyPr wrap="square" lIns="0" rIns="0" tIns="0" bIns="0" anchor="t">
+            <a:spAutoFit/>
+          </a:bodyPr>
+          <a:lstStyle/>
+          <a:p>
+            <a:pPr algn="l">
+              <a:lnSpc>
+                <a:spcPts val="725"/>
+              </a:lnSpc>
+            </a:pPr>
+            <a:r>
+              <a:rPr sz="500" b="1" spc="100">
+                <a:solidFill>
+                  <a:srgbClr val="6B7280"/>
+                </a:solidFill>
+                <a:latin typeface="맑은 고딕"/>
+                <a:ea typeface="맑은 고딕"/>
+              </a:rPr>
+              <a:t>02</a:t>
+            </a:r>
+          </a:p>
+        </p:txBody>
+      </p:sp>
+      <p:sp>
+        <p:nvSpPr>
+          <p:cNvPr id="9" name="텍스트"/>
+          <p:cNvSpPr txBox="1"/>
+          <p:nvPr/>
+        </p:nvSpPr>
+        <p:spPr>
+          <a:xfrm>
+            <a:off x="489600" y="684000"/>
+            <a:ext cx="1260000" cy="133351"/>
           </a:xfrm>
           <a:prstGeom prst="rect">
             <a:avLst/>
@@ -3896,7 +4013,484 @@
               </a:lnSpc>
             </a:pPr>
             <a:r>
-              <a:rPr sz="700" b="1" spc="200">
+              <a:rPr sz="700" b="0">
+                <a:solidFill>
+                  <a:srgbClr val="12151C"/>
+                </a:solidFill>
+                <a:latin typeface="맑은 고딕"/>
+                <a:ea typeface="맑은 고딕"/>
+              </a:rPr>
+              <a:t>정기 구독</a:t>
+            </a:r>
+          </a:p>
+        </p:txBody>
+      </p:sp>
+      <p:cxnSp>
+        <p:nvCxnSpPr>
+          <p:cNvPr id="10" name="Connector 9"/>
+          <p:cNvCxnSpPr/>
+          <p:nvPr/>
+        </p:nvCxnSpPr>
+        <p:spPr>
+          <a:xfrm>
+            <a:off x="252000" y="828000"/>
+            <a:ext cx="1512000" cy="0"/>
+          </a:xfrm>
+          <a:prstGeom prst="line">
+            <a:avLst/>
+          </a:prstGeom>
+          <a:ln w="3600">
+            <a:solidFill>
+              <a:srgbClr val="DCDFE4"/>
+            </a:solidFill>
+          </a:ln>
+        </p:spPr>
+      </p:cxnSp>
+      <p:sp>
+        <p:nvSpPr>
+          <p:cNvPr id="11" name="텍스트"/>
+          <p:cNvSpPr txBox="1"/>
+          <p:nvPr/>
+        </p:nvSpPr>
+        <p:spPr>
+          <a:xfrm>
+            <a:off x="252000" y="882000"/>
+            <a:ext cx="216000" cy="95251"/>
+          </a:xfrm>
+          <a:prstGeom prst="rect">
+            <a:avLst/>
+          </a:prstGeom>
+          <a:noFill/>
+        </p:spPr>
+        <p:txBody>
+          <a:bodyPr wrap="square" lIns="0" rIns="0" tIns="0" bIns="0" anchor="t">
+            <a:spAutoFit/>
+          </a:bodyPr>
+          <a:lstStyle/>
+          <a:p>
+            <a:pPr algn="l">
+              <a:lnSpc>
+                <a:spcPts val="725"/>
+              </a:lnSpc>
+            </a:pPr>
+            <a:r>
+              <a:rPr sz="500" b="1" spc="100">
+                <a:solidFill>
+                  <a:srgbClr val="6B7280"/>
+                </a:solidFill>
+                <a:latin typeface="맑은 고딕"/>
+                <a:ea typeface="맑은 고딕"/>
+              </a:rPr>
+              <a:t>03</a:t>
+            </a:r>
+          </a:p>
+        </p:txBody>
+      </p:sp>
+      <p:sp>
+        <p:nvSpPr>
+          <p:cNvPr id="12" name="텍스트"/>
+          <p:cNvSpPr txBox="1"/>
+          <p:nvPr/>
+        </p:nvSpPr>
+        <p:spPr>
+          <a:xfrm>
+            <a:off x="489600" y="871200"/>
+            <a:ext cx="1260000" cy="133351"/>
+          </a:xfrm>
+          <a:prstGeom prst="rect">
+            <a:avLst/>
+          </a:prstGeom>
+          <a:noFill/>
+        </p:spPr>
+        <p:txBody>
+          <a:bodyPr wrap="square" lIns="0" rIns="0" tIns="0" bIns="0" anchor="t">
+            <a:spAutoFit/>
+          </a:bodyPr>
+          <a:lstStyle/>
+          <a:p>
+            <a:pPr algn="l">
+              <a:lnSpc>
+                <a:spcPts val="1015"/>
+              </a:lnSpc>
+            </a:pPr>
+            <a:r>
+              <a:rPr sz="700" b="0">
+                <a:solidFill>
+                  <a:srgbClr val="12151C"/>
+                </a:solidFill>
+                <a:latin typeface="맑은 고딕"/>
+                <a:ea typeface="맑은 고딕"/>
+              </a:rPr>
+              <a:t>이사 정리</a:t>
+            </a:r>
+          </a:p>
+        </p:txBody>
+      </p:sp>
+      <p:cxnSp>
+        <p:nvCxnSpPr>
+          <p:cNvPr id="13" name="Connector 12"/>
+          <p:cNvCxnSpPr/>
+          <p:nvPr/>
+        </p:nvCxnSpPr>
+        <p:spPr>
+          <a:xfrm>
+            <a:off x="252000" y="1015200"/>
+            <a:ext cx="1512000" cy="0"/>
+          </a:xfrm>
+          <a:prstGeom prst="line">
+            <a:avLst/>
+          </a:prstGeom>
+          <a:ln w="3600">
+            <a:solidFill>
+              <a:srgbClr val="DCDFE4"/>
+            </a:solidFill>
+          </a:ln>
+        </p:spPr>
+      </p:cxnSp>
+      <p:sp>
+        <p:nvSpPr>
+          <p:cNvPr id="14" name="텍스트"/>
+          <p:cNvSpPr txBox="1"/>
+          <p:nvPr/>
+        </p:nvSpPr>
+        <p:spPr>
+          <a:xfrm>
+            <a:off x="252000" y="1069200"/>
+            <a:ext cx="216000" cy="95251"/>
+          </a:xfrm>
+          <a:prstGeom prst="rect">
+            <a:avLst/>
+          </a:prstGeom>
+          <a:noFill/>
+        </p:spPr>
+        <p:txBody>
+          <a:bodyPr wrap="square" lIns="0" rIns="0" tIns="0" bIns="0" anchor="t">
+            <a:spAutoFit/>
+          </a:bodyPr>
+          <a:lstStyle/>
+          <a:p>
+            <a:pPr algn="l">
+              <a:lnSpc>
+                <a:spcPts val="725"/>
+              </a:lnSpc>
+            </a:pPr>
+            <a:r>
+              <a:rPr sz="500" b="1" spc="100">
+                <a:solidFill>
+                  <a:srgbClr val="6B7280"/>
+                </a:solidFill>
+                <a:latin typeface="맑은 고딕"/>
+                <a:ea typeface="맑은 고딕"/>
+              </a:rPr>
+              <a:t>04</a:t>
+            </a:r>
+          </a:p>
+        </p:txBody>
+      </p:sp>
+      <p:sp>
+        <p:nvSpPr>
+          <p:cNvPr id="15" name="텍스트"/>
+          <p:cNvSpPr txBox="1"/>
+          <p:nvPr/>
+        </p:nvSpPr>
+        <p:spPr>
+          <a:xfrm>
+            <a:off x="489600" y="1058400"/>
+            <a:ext cx="1260000" cy="133351"/>
+          </a:xfrm>
+          <a:prstGeom prst="rect">
+            <a:avLst/>
+          </a:prstGeom>
+          <a:noFill/>
+        </p:spPr>
+        <p:txBody>
+          <a:bodyPr wrap="square" lIns="0" rIns="0" tIns="0" bIns="0" anchor="t">
+            <a:spAutoFit/>
+          </a:bodyPr>
+          <a:lstStyle/>
+          <a:p>
+            <a:pPr algn="l">
+              <a:lnSpc>
+                <a:spcPts val="1015"/>
+              </a:lnSpc>
+            </a:pPr>
+            <a:r>
+              <a:rPr sz="700" b="0">
+                <a:solidFill>
+                  <a:srgbClr val="12151C"/>
+                </a:solidFill>
+                <a:latin typeface="맑은 고딕"/>
+                <a:ea typeface="맑은 고딕"/>
+              </a:rPr>
+              <a:t>당일 배송</a:t>
+            </a:r>
+          </a:p>
+        </p:txBody>
+      </p:sp>
+      <p:cxnSp>
+        <p:nvCxnSpPr>
+          <p:cNvPr id="16" name="Connector 15"/>
+          <p:cNvCxnSpPr/>
+          <p:nvPr/>
+        </p:nvCxnSpPr>
+        <p:spPr>
+          <a:xfrm>
+            <a:off x="252000" y="1202400"/>
+            <a:ext cx="1512000" cy="0"/>
+          </a:xfrm>
+          <a:prstGeom prst="line">
+            <a:avLst/>
+          </a:prstGeom>
+          <a:ln w="3600">
+            <a:solidFill>
+              <a:srgbClr val="DCDFE4"/>
+            </a:solidFill>
+          </a:ln>
+        </p:spPr>
+      </p:cxnSp>
+      <p:sp>
+        <p:nvSpPr>
+          <p:cNvPr id="17" name="Rectangle 16"/>
+          <p:cNvSpPr/>
+          <p:nvPr/>
+        </p:nvSpPr>
+        <p:spPr>
+          <a:xfrm>
+            <a:off x="2088000" y="252000"/>
+            <a:ext cx="900000" cy="1296000"/>
+          </a:xfrm>
+          <a:prstGeom prst="rect">
+            <a:avLst/>
+          </a:prstGeom>
+          <a:solidFill>
+            <a:srgbClr val="FF8A7A"/>
+          </a:solidFill>
+          <a:ln>
+            <a:noFill/>
+          </a:ln>
+        </p:spPr>
+        <p:txBody>
+          <a:bodyPr rtlCol="0" anchor="ctr"/>
+          <a:lstStyle/>
+          <a:p>
+            <a:pPr algn="ctr"/>
+          </a:p>
+        </p:txBody>
+      </p:sp>
+      <p:sp>
+        <p:nvSpPr>
+          <p:cNvPr id="18" name="텍스트"/>
+          <p:cNvSpPr txBox="1"/>
+          <p:nvPr/>
+        </p:nvSpPr>
+        <p:spPr>
+          <a:xfrm>
+            <a:off x="2196000" y="360000"/>
+            <a:ext cx="684000" cy="95251"/>
+          </a:xfrm>
+          <a:prstGeom prst="rect">
+            <a:avLst/>
+          </a:prstGeom>
+          <a:noFill/>
+        </p:spPr>
+        <p:txBody>
+          <a:bodyPr wrap="square" lIns="0" rIns="0" tIns="0" bIns="0" anchor="t">
+            <a:spAutoFit/>
+          </a:bodyPr>
+          <a:lstStyle/>
+          <a:p>
+            <a:pPr algn="l">
+              <a:lnSpc>
+                <a:spcPts val="725"/>
+              </a:lnSpc>
+            </a:pPr>
+            <a:r>
+              <a:rPr sz="500" b="1" spc="240">
+                <a:solidFill>
+                  <a:srgbClr val="12151C">
+                    <a:alpha val="75000"/>
+                  </a:srgbClr>
+                </a:solidFill>
+                <a:latin typeface="맑은 고딕"/>
+                <a:ea typeface="맑은 고딕"/>
+              </a:rPr>
+              <a:t>INFO</a:t>
+            </a:r>
+          </a:p>
+        </p:txBody>
+      </p:sp>
+      <p:sp>
+        <p:nvSpPr>
+          <p:cNvPr id="19" name="텍스트"/>
+          <p:cNvSpPr txBox="1"/>
+          <p:nvPr/>
+        </p:nvSpPr>
+        <p:spPr>
+          <a:xfrm>
+            <a:off x="2196000" y="504000"/>
+            <a:ext cx="684000" cy="121921"/>
+          </a:xfrm>
+          <a:prstGeom prst="rect">
+            <a:avLst/>
+          </a:prstGeom>
+          <a:noFill/>
+        </p:spPr>
+        <p:txBody>
+          <a:bodyPr wrap="square" lIns="0" rIns="0" tIns="0" bIns="0" anchor="t">
+            <a:spAutoFit/>
+          </a:bodyPr>
+          <a:lstStyle/>
+          <a:p>
+            <a:pPr algn="l">
+              <a:lnSpc>
+                <a:spcPts val="927"/>
+              </a:lnSpc>
+            </a:pPr>
+            <a:r>
+              <a:rPr sz="640" b="1">
+                <a:solidFill>
+                  <a:srgbClr val="12151C"/>
+                </a:solidFill>
+                <a:latin typeface="맑은 고딕"/>
+                <a:ea typeface="맑은 고딕"/>
+              </a:rPr>
+              <a:t>월–토 09:00 – 18:00</a:t>
+            </a:r>
+          </a:p>
+        </p:txBody>
+      </p:sp>
+      <p:cxnSp>
+        <p:nvCxnSpPr>
+          <p:cNvPr id="20" name="Connector 19"/>
+          <p:cNvCxnSpPr/>
+          <p:nvPr/>
+        </p:nvCxnSpPr>
+        <p:spPr>
+          <a:xfrm>
+            <a:off x="2196000" y="770400"/>
+            <a:ext cx="684000" cy="0"/>
+          </a:xfrm>
+          <a:prstGeom prst="line">
+            <a:avLst/>
+          </a:prstGeom>
+          <a:ln w="3600">
+            <a:solidFill>
+              <a:srgbClr val="12151C"/>
+            </a:solidFill>
+          </a:ln>
+        </p:spPr>
+      </p:cxnSp>
+      <p:sp>
+        <p:nvSpPr>
+          <p:cNvPr id="21" name="텍스트"/>
+          <p:cNvSpPr txBox="1"/>
+          <p:nvPr/>
+        </p:nvSpPr>
+        <p:spPr>
+          <a:xfrm>
+            <a:off x="2196000" y="849600"/>
+            <a:ext cx="684000" cy="91441"/>
+          </a:xfrm>
+          <a:prstGeom prst="rect">
+            <a:avLst/>
+          </a:prstGeom>
+          <a:noFill/>
+        </p:spPr>
+        <p:txBody>
+          <a:bodyPr wrap="square" lIns="0" rIns="0" tIns="0" bIns="0" anchor="t">
+            <a:spAutoFit/>
+          </a:bodyPr>
+          <a:lstStyle/>
+          <a:p>
+            <a:pPr algn="l">
+              <a:lnSpc>
+                <a:spcPts val="696"/>
+              </a:lnSpc>
+            </a:pPr>
+            <a:r>
+              <a:rPr sz="480" b="1" spc="140">
+                <a:solidFill>
+                  <a:srgbClr val="12151C">
+                    <a:alpha val="75000"/>
+                  </a:srgbClr>
+                </a:solidFill>
+                <a:latin typeface="맑은 고딕"/>
+                <a:ea typeface="맑은 고딕"/>
+              </a:rPr>
+              <a:t>KAKAO</a:t>
+            </a:r>
+          </a:p>
+        </p:txBody>
+      </p:sp>
+      <p:sp>
+        <p:nvSpPr>
+          <p:cNvPr id="22" name="텍스트"/>
+          <p:cNvSpPr txBox="1"/>
+          <p:nvPr/>
+        </p:nvSpPr>
+        <p:spPr>
+          <a:xfrm>
+            <a:off x="2196000" y="957600"/>
+            <a:ext cx="684000" cy="121921"/>
+          </a:xfrm>
+          <a:prstGeom prst="rect">
+            <a:avLst/>
+          </a:prstGeom>
+          <a:noFill/>
+        </p:spPr>
+        <p:txBody>
+          <a:bodyPr wrap="square" lIns="0" rIns="0" tIns="0" bIns="0" anchor="t">
+            <a:spAutoFit/>
+          </a:bodyPr>
+          <a:lstStyle/>
+          <a:p>
+            <a:pPr algn="l">
+              <a:lnSpc>
+                <a:spcPts val="927"/>
+              </a:lnSpc>
+            </a:pPr>
+            <a:r>
+              <a:rPr sz="640" b="1">
+                <a:solidFill>
+                  <a:srgbClr val="12151C"/>
+                </a:solidFill>
+                <a:latin typeface="맑은 고딕"/>
+                <a:ea typeface="맑은 고딕"/>
+              </a:rPr>
+              <a:t>@채널아이디</a:t>
+            </a:r>
+          </a:p>
+        </p:txBody>
+      </p:sp>
+      <p:sp>
+        <p:nvSpPr>
+          <p:cNvPr id="23" name="텍스트"/>
+          <p:cNvSpPr txBox="1"/>
+          <p:nvPr/>
+        </p:nvSpPr>
+        <p:spPr>
+          <a:xfrm>
+            <a:off x="2196000" y="1368000"/>
+            <a:ext cx="720000" cy="106681"/>
+          </a:xfrm>
+          <a:prstGeom prst="rect">
+            <a:avLst/>
+          </a:prstGeom>
+          <a:noFill/>
+        </p:spPr>
+        <p:txBody>
+          <a:bodyPr wrap="square" lIns="0" rIns="0" tIns="0" bIns="0" anchor="t">
+            <a:spAutoFit/>
+          </a:bodyPr>
+          <a:lstStyle/>
+          <a:p>
+            <a:pPr algn="l">
+              <a:lnSpc>
+                <a:spcPts val="811"/>
+              </a:lnSpc>
+            </a:pPr>
+            <a:r>
+              <a:rPr sz="560" b="1" spc="80">
                 <a:solidFill>
                   <a:srgbClr val="12151C"/>
                 </a:solidFill>
